--- a/销售企微运营/示例/企微话题引擎_周会汇报.pptx
+++ b/销售企微运营/示例/企微话题引擎_周会汇报.pptx
@@ -3575,7 +3575,7 @@
                 <a:latin typeface="微软雅黑"/>
                 <a:ea typeface="微软雅黑"/>
               </a:rPr>
-              <a:t>联想（深圳）在线销售团队　·　部门周会汇报　·　2026-07-22</a:t>
+              <a:t>B2B 销售团队 · 企微运营提效 · 部门周会汇报 · 2026-07-22</a:t>
             </a:r>
           </a:p>
         </p:txBody>
@@ -5186,7 +5186,7 @@
                 <a:latin typeface="微软雅黑"/>
                 <a:ea typeface="微软雅黑"/>
               </a:rPr>
-              <a:t>联想（深圳）在线销售团队 · 用AI助力企微运营 · 每周话题话术引擎</a:t>
+              <a:t>企微每周话题话术引擎 · 部门周会汇报</a:t>
             </a:r>
           </a:p>
         </p:txBody>
@@ -5511,7 +5511,7 @@
                           <a:latin typeface="微软雅黑"/>
                           <a:ea typeface="微软雅黑"/>
                         </a:rPr>
-                        <a:t>联想衔接点</a:t>
+                        <a:t>公司衔接点</a:t>
                       </a:r>
                     </a:p>
                   </a:txBody>
@@ -5582,7 +5582,7 @@
                           <a:latin typeface="微软雅黑"/>
                           <a:ea typeface="微软雅黑"/>
                         </a:rPr>
-                        <a:t>联想好消息</a:t>
+                        <a:t>公司好消息</a:t>
                       </a:r>
                     </a:p>
                   </a:txBody>
@@ -5979,7 +5979,7 @@
                           <a:latin typeface="微软雅黑"/>
                           <a:ea typeface="微软雅黑"/>
                         </a:rPr>
-                        <a:t>批量换新 / TruScale</a:t>
+                        <a:t>批量换新 / 订阅式服务</a:t>
                       </a:r>
                     </a:p>
                   </a:txBody>
@@ -6284,7 +6284,7 @@
                           <a:latin typeface="微软雅黑"/>
                           <a:ea typeface="微软雅黑"/>
                         </a:rPr>
-                        <a:t>联想活动 / 权益</a:t>
+                        <a:t>公司活动 / 权益</a:t>
                       </a:r>
                     </a:p>
                   </a:txBody>
@@ -6523,7 +6523,7 @@
                 <a:latin typeface="微软雅黑"/>
                 <a:ea typeface="微软雅黑"/>
               </a:rPr>
-              <a:t>联想（深圳）在线销售团队 · 用AI助力企微运营 · 每周话题话术引擎</a:t>
+              <a:t>企微每周话题话术引擎 · 部门周会汇报</a:t>
             </a:r>
           </a:p>
         </p:txBody>
@@ -6715,7 +6715,7 @@
                 <a:latin typeface="微软雅黑"/>
                 <a:ea typeface="微软雅黑"/>
               </a:rPr>
-              <a:t>三段式公式 + 四条红线 + 实样</a:t>
+              <a:t>五段式公式 + 四条红线 + 实样</a:t>
             </a:r>
           </a:p>
           <a:p>
@@ -7040,7 +7040,7 @@
                 <a:latin typeface="微软雅黑"/>
                 <a:ea typeface="微软雅黑"/>
               </a:rPr>
-              <a:t>联想衔接</a:t>
+              <a:t>公司衔接</a:t>
             </a:r>
           </a:p>
         </p:txBody>
@@ -7381,7 +7381,7 @@
                 <a:latin typeface="微软雅黑"/>
                 <a:ea typeface="微软雅黑"/>
               </a:rPr>
-              <a:t>联想衔接：</a:t>
+              <a:t>公司衔接：</a:t>
             </a:r>
             <a:r>
               <a:rPr sz="1500" b="0" a:altLang="en-US">
@@ -7814,7 +7814,7 @@
                 <a:latin typeface="微软雅黑"/>
                 <a:ea typeface="微软雅黑"/>
               </a:rPr>
-              <a:t>实样话术（类别①联想好消息）</a:t>
+              <a:t>实样话术（类别①公司好消息）</a:t>
             </a:r>
           </a:p>
         </p:txBody>
@@ -7857,7 +7857,7 @@
                 <a:latin typeface="微软雅黑"/>
                 <a:ea typeface="微软雅黑"/>
               </a:rPr>
-              <a:t>X总早上好，分享个好消息：联想刚公布史上最好的一年——全年营收近 5900 亿，AI 业务直接翻番。其实我们早就不只是卖电脑，从员工的 PC 到机房服务器、再到产线 AI 方案都能接。您这边要是有 IT 或研发设备的规划，随时喊我帮您把方案捋一捋。</a:t>
+              <a:t>X总早上好，分享个好消息：我们上半年业绩创了新高，还刚入选了年度行业解决方案榜单。其实我们早就不只是卖单品，从员工的终端到机房服务器、再到产线 AI 方案都能接。您这边要是有 IT 或研发设备的规划，随时喊我帮您把方案捋一捋。</a:t>
             </a:r>
           </a:p>
           <a:p>
@@ -7920,7 +7920,7 @@
                 <a:latin typeface="微软雅黑"/>
                 <a:ea typeface="微软雅黑"/>
               </a:rPr>
-              <a:t>联想（深圳）在线销售团队 · 用AI助力企微运营 · 每周话题话术引擎</a:t>
+              <a:t>企微每周话题话术引擎 · 部门周会汇报</a:t>
             </a:r>
           </a:p>
         </p:txBody>
@@ -8112,7 +8112,7 @@
                 <a:latin typeface="微软雅黑"/>
                 <a:ea typeface="微软雅黑"/>
               </a:rPr>
-              <a:t>本周话题包已真实产出 · 直接复制发企微</a:t>
+              <a:t>本周话题包示例 · 直接复制发企微</a:t>
             </a:r>
           </a:p>
           <a:p>
@@ -8482,7 +8482,7 @@
                 <a:latin typeface="微软雅黑"/>
                 <a:ea typeface="微软雅黑"/>
               </a:rPr>
-              <a:t>承接：客户有意向 → 盘点在用老旧设备，做换新 + TruScale 两套方案</a:t>
+              <a:t>承接：客户有意向 → 盘点在用老旧设备，做换新 + 订阅式服务两套方案</a:t>
             </a:r>
           </a:p>
         </p:txBody>
@@ -8702,7 +8702,7 @@
                 <a:latin typeface="微软雅黑"/>
                 <a:ea typeface="微软雅黑"/>
               </a:rPr>
-              <a:t>ThinkStation P4 液冷工作站，本地跑 32B 大模型</a:t>
+              <a:t>新款 AI 工作站，本地跑 32B 大模型</a:t>
             </a:r>
           </a:p>
         </p:txBody>
@@ -8789,7 +8789,7 @@
                 <a:latin typeface="微软雅黑"/>
                 <a:ea typeface="微软雅黑"/>
               </a:rPr>
-              <a:t>X总好，现在 AI 这么火，制造业先落地的往往是研发端。联想刚上市新款 ThinkStation P4 液冷工作站，本地就能稳跑 32B 大模型，做仿真、建模、AI 开发都不用挤云上、数据也不出厂。您们研发跑大型图纸或仿真现在扛得住吗？</a:t>
+              <a:t>X总好，现在 AI 这么火，制造业先落地的往往是研发端。我们刚上市新款 AI 工作站，本地就能稳跑 32B 大模型，做仿真、建模、AI 开发都不用挤云上、数据也不出厂。您们研发跑大型图纸或仿真现在扛得住吗？</a:t>
             </a:r>
           </a:p>
         </p:txBody>
@@ -9139,7 +9139,7 @@
                 <a:latin typeface="微软雅黑"/>
                 <a:ea typeface="微软雅黑"/>
               </a:rPr>
-              <a:t>X总，大暑了，深圳这两天是真晒。车间和现场注意通风降温，提醒大家多喝水别中暑，周末也记得歇歇。有需要随时招呼我，不打扰您了。</a:t>
+              <a:t>X总，大暑了，这两天是真晒。车间和现场注意通风降温，提醒大家多喝水别中暑，周末也记得歇歇。有需要随时招呼我，不打扰您了。</a:t>
             </a:r>
           </a:p>
         </p:txBody>
@@ -9355,7 +9355,7 @@
                 <a:latin typeface="微软雅黑"/>
                 <a:ea typeface="微软雅黑"/>
               </a:rPr>
-              <a:t>联想（深圳）在线销售团队 · 用AI助力企微运营 · 每周话题话术引擎</a:t>
+              <a:t>企微每周话题话术引擎 · 部门周会汇报</a:t>
             </a:r>
           </a:p>
         </p:txBody>
